--- a/docs/slides/onevisit-pitch-v2.pptx
+++ b/docs/slides/onevisit-pitch-v2.pptx
@@ -114,34 +114,34 @@
   <p:extLst>
     <p:ext uri="{521415D9-36F7-43E2-AB2F-B90AF26B5E84}">
       <p14:sectionLst xmlns:p14="http://schemas.microsoft.com/office/powerpoint/2010/main">
-        <p14:section name="Apertura" id="{2dbe95c4-3f90-b63b-4683-433531d325b6}">
+        <p14:section name="Apertura" id="{b18a76c3-a7a7-678c-9f4a-b27dad92bff4}">
           <p14:sldIdLst>
             <p14:sldId id="256"/>
           </p14:sldIdLst>
         </p14:section>
-        <p14:section name="Situazione e problema" id="{9a794729-a62e-0ca1-4daf-5a306097ffab}">
+        <p14:section name="Situazione e problema" id="{402992a9-7b80-0c2a-6ff8-2d97d6194e7f}">
           <p14:sldIdLst>
             <p14:sldId id="257"/>
             <p14:sldId id="258"/>
           </p14:sldIdLst>
         </p14:section>
-        <p14:section name="Per il cittadino" id="{2054af5e-154a-77d2-ed09-b2209a713b8c}">
+        <p14:section name="Per il cittadino" id="{92a3be2c-feb8-dd72-d610-649f68287c72}">
           <p14:sldIdLst>
             <p14:sldId id="259"/>
             <p14:sldId id="260"/>
           </p14:sldIdLst>
         </p14:section>
-        <p14:section name="Dove lavora Claude" id="{3cbcda6d-a3ac-d222-1e9b-c6c9fb9ff5ea}">
+        <p14:section name="Dove lavora Claude" id="{69f76ce2-1333-6b6b-5644-36813a5ce8a4}">
           <p14:sldIdLst>
             <p14:sldId id="261"/>
           </p14:sldIdLst>
         </p14:section>
-        <p14:section name="Per il Comune" id="{31c8743f-e96e-863d-da9b-64cbe34e47ee}">
+        <p14:section name="Per il Comune" id="{7f99a531-a4a9-dc2b-daa4-9b5f7976d0b8}">
           <p14:sldIdLst>
             <p14:sldId id="262"/>
           </p14:sldIdLst>
         </p14:section>
-        <p14:section name="Chiusura" id="{c08bb204-c14d-e03c-0150-c9d1076dcd64}">
+        <p14:section name="Chiusura" id="{bc866e57-173a-b171-fc2f-ecf583db2bba}">
           <p14:sldIdLst>
             <p14:sldId id="263"/>
           </p14:sldIdLst>
